--- a/PPTs/ARM_Instruction_References OLD.pptx
+++ b/PPTs/ARM_Instruction_References OLD.pptx
@@ -1273,7 +1273,7 @@
             </a:r>
             <a:r>
               <a:rPr lang="en-US" sz="1200" dirty="0" err="1"/>
-              <a:t>psuedo</a:t>
+              <a:t>pseudo</a:t>
             </a:r>
             <a:r>
               <a:rPr lang="en-US" sz="1200" dirty="0"/>
@@ -1388,7 +1388,7 @@
             </a:r>
             <a:r>
               <a:rPr lang="en-US" sz="1200" dirty="0" err="1"/>
-              <a:t>psuedo</a:t>
+              <a:t>pseudo</a:t>
             </a:r>
             <a:r>
               <a:rPr lang="en-US" sz="1200" dirty="0"/>
@@ -5387,7 +5387,7 @@
           <a:p>
             <a:r>
               <a:rPr lang="en-US" dirty="0"/>
-              <a:t>Fall 2025</a:t>
+              <a:t>Fall 2026</a:t>
             </a:r>
           </a:p>
         </p:txBody>
@@ -6535,12 +6535,8 @@
                         <a:t>B </a:t>
                       </a:r>
                       <a:r>
-                        <a:rPr lang="en-US" sz="1600" dirty="0" err="1"/>
-                        <a:t>LABELAlways</a:t>
-                      </a:r>
-                      <a:r>
                         <a:rPr lang="en-US" sz="1600" dirty="0"/>
-                        <a:t> Branch to LABEL</a:t>
+                        <a:t>LABEL</a:t>
                       </a:r>
                     </a:p>
                   </a:txBody>
@@ -6551,6 +6547,10 @@
                     <a:bodyPr/>
                     <a:lstStyle/>
                     <a:p>
+                      <a:r>
+                        <a:rPr lang="en-US" sz="1600" dirty="0"/>
+                        <a:t>Always Branch to LABEL</a:t>
+                      </a:r>
                       <a:endParaRPr lang="en-US" sz="1600" dirty="0"/>
                     </a:p>
                   </a:txBody>
@@ -6976,7 +6976,7 @@
                     <a:p>
                       <a:r>
                         <a:rPr lang="en-US" sz="1600" dirty="0"/>
-                        <a:t>MOVN r4, r2</a:t>
+                        <a:t>MVN r4, r2</a:t>
                       </a:r>
                     </a:p>
                   </a:txBody>
@@ -7259,7 +7259,7 @@
                     <a:p>
                       <a:r>
                         <a:rPr lang="en-US" sz="1600" dirty="0"/>
-                        <a:t>Shifts can operate on 3rd register operand of arithmetic or logical instruction, e.g., r4 ← r5 AND (logical shift left r6 by 8 positions) </a:t>
+                        <a:t>Shifts can operate on 3rd register operand of arithmetic or logical instruction, e.g., r4 ← r5 AND (logical shift left r6 by 2 positions) </a:t>
                       </a:r>
                     </a:p>
                   </a:txBody>
@@ -7324,7 +7324,7 @@
           <a:p>
             <a:r>
               <a:rPr lang="en-US" dirty="0"/>
-              <a:t>Ch6 ARM Flow Control:</a:t>
+              <a:t>Ch6 ARM Control Flow:</a:t>
             </a:r>
             <a:br>
               <a:rPr lang="en-US" dirty="0"/>
@@ -9924,7 +9924,7 @@
           <a:p>
             <a:r>
               <a:rPr lang="en-US" dirty="0"/>
-              <a:t>Ch6 ARM Flow Control:</a:t>
+              <a:t>Ch6 ARM Control Flow:</a:t>
             </a:r>
             <a:br>
               <a:rPr lang="en-US" dirty="0"/>
@@ -12607,7 +12607,7 @@
           <a:p>
             <a:r>
               <a:rPr lang="en-US" dirty="0"/>
-              <a:t>Ch6 ARM Flow Control:</a:t>
+              <a:t>Ch6 ARM Control Flow:</a:t>
             </a:r>
             <a:br>
               <a:rPr lang="en-US" dirty="0"/>
@@ -12652,7 +12652,7 @@
           <p:nvPr/>
         </p:nvGraphicFramePr>
         <p:xfrm>
-          <a:off x="304800" y="1447800"/>
+          <a:off x="304800" y="1295400"/>
           <a:ext cx="8534400" cy="4572000"/>
         </p:xfrm>
         <a:graphic>
@@ -15077,6 +15077,70 @@
           </a:graphicData>
         </a:graphic>
       </p:graphicFrame>
+      <p:sp>
+        <p:nvSpPr>
+          <p:cNvPr id="6" name="Cortex-M IT note"/>
+          <p:cNvSpPr txBox="1"/>
+          <p:nvPr/>
+        </p:nvSpPr>
+        <p:spPr>
+          <a:xfrm>
+            <a:off x="304800" y="5927400"/>
+            <a:ext cx="8534400" cy="420000"/>
+          </a:xfrm>
+          <a:prstGeom prst="rect">
+            <a:avLst/>
+          </a:prstGeom>
+          <a:noFill/>
+        </p:spPr>
+        <p:txBody>
+          <a:bodyPr wrap="square" lIns="0" tIns="0" rIns="0" bIns="0" rtlCol="0" anchor="t">
+            <a:noAutofit/>
+          </a:bodyPr>
+          <a:lstStyle/>
+          <a:p>
+            <a:pPr marL="0" indent="0">
+              <a:buNone/>
+            </a:pPr>
+            <a:r>
+              <a:rPr lang="en-US" sz="1200" b="1" dirty="0"/>
+              <a:t>Cortex-M (Thumb-2): </a:t>
+            </a:r>
+            <a:r>
+              <a:rPr lang="en-US" sz="1200" dirty="0"/>
+              <a:t>a conditional instruction must be inside an IT block, e.g. </a:t>
+            </a:r>
+            <a:r>
+              <a:rPr lang="en-US" sz="1200" b="1" dirty="0">
+                <a:solidFill>
+                  <a:srgbClr val="C00000"/>
+                </a:solidFill>
+                <a:latin typeface="Consolas" panose="020B0609020204030204" pitchFamily="49" charset="0"/>
+                <a:cs typeface="Consolas" panose="020B0609020204030204" pitchFamily="49" charset="0"/>
+              </a:rPr>
+              <a:t>IT EQ</a:t>
+            </a:r>
+            <a:r>
+              <a:rPr lang="en-US" sz="1200" dirty="0"/>
+              <a:t> / </a:t>
+            </a:r>
+            <a:r>
+              <a:rPr lang="en-US" sz="1200" b="1" dirty="0">
+                <a:solidFill>
+                  <a:srgbClr val="C00000"/>
+                </a:solidFill>
+                <a:latin typeface="Consolas" panose="020B0609020204030204" pitchFamily="49" charset="0"/>
+                <a:cs typeface="Consolas" panose="020B0609020204030204" pitchFamily="49" charset="0"/>
+              </a:rPr>
+              <a:t>ADDEQ r3, r2, r1</a:t>
+            </a:r>
+            <a:r>
+              <a:rPr lang="en-US" sz="1200" dirty="0"/>
+              <a:t>; Cortex-M0/M0+ has no IT.</a:t>
+            </a:r>
+          </a:p>
+        </p:txBody>
+      </p:sp>
     </p:spTree>
     <p:extLst>
       <p:ext uri="{BB962C8B-B14F-4D97-AF65-F5344CB8AC3E}">
